--- a/Lesson17-AgentFramework/Lesson17-AgentFramework.pptx
+++ b/Lesson17-AgentFramework/Lesson17-AgentFramework.pptx
@@ -1215,7 +1215,7 @@
           <a:p>
             <a:r>
               <a:rPr lang="en-US" dirty="0"/>
-              <a:t>Set OPENAI_API_KEY and run the project. The banner prints exactly as it is spelled in the source, Tarvel Agent Framework Initialized, typo included. Type a request with a budget, and after the AGENT IS THINKING line the reply is printed with the agent's name, TravelAssistant, in front. Because of the Instructions, the reply should be organised into Budget, Mid-range and Luxury options. The destinations on this slide are illustrative; the model's suggestions will differ. Ask a follow-up and the agent remembers your budget, because the loop appends each reply to the shared history. Type exit to quit.</a:t>
+              <a:t>Set OPENAI_API_KEY and run the project. The banner reads Travel Agent Framework Initialized. Type a request with a budget, and after the AGENT IS THINKING line the reply is printed with the agent's name, TravelAssistant, in front. Because of the Instructions, the reply should be organised into Budget, Mid-range and Luxury options. The destinations on this slide are illustrative; the model's suggestions will differ. Ask a follow-up and the agent remembers your budget, because the loop appends each reply to the shared history. Type exit to quit.</a:t>
             </a:r>
             <a:endParaRPr lang="en-US" dirty="0"/>
           </a:p>
@@ -1303,7 +1303,7 @@
           <a:p>
             <a:r>
               <a:rPr lang="en-US" dirty="0"/>
-              <a:t>Try this on your own. Add a reset command to the loop that clears the ChatHistory and prints a confirmation. Test it by giving a budget, resetting, and asking a follow-up: the agent should no longer know the budget, which proves that memory lives in the history you own, not in the agent. While you are in the file, fix the typos in the persona text and the banner, and add the missing space between the first two sentences of the Instructions. Confirm the replies still come back in three tiers.</a:t>
+              <a:t>Try this on your own. Add a reset command to the loop that clears the ChatHistory and prints a confirmation. Test it by giving a budget, resetting, and asking a follow-up: the agent should no longer know the budget, which proves that memory lives in the history you own, not in the agent. Then print chatHistory.Count after each reply, and watch it grow by two with every exchange and drop back to zero after a reset. Confirm the replies still come back in three tiers.</a:t>
             </a:r>
             <a:endParaRPr lang="en-US" dirty="0"/>
           </a:p>
@@ -8640,7 +8640,7 @@
                 <a:ea typeface="Courier New" pitchFamily="34" charset="-122"/>
                 <a:cs typeface="Courier New" pitchFamily="34" charset="-120"/>
               </a:rPr>
-              <a:t>Tarvel Agent Framework Initialized</a:t>
+              <a:t>Travel Agent Framework Initialized</a:t>
             </a:r>
             <a:endParaRPr lang="en-US" sz="1100" dirty="0"/>
           </a:p>
@@ -9396,7 +9396,7 @@
                 <a:ea typeface="Cambria" pitchFamily="34" charset="-122"/>
                 <a:cs typeface="Cambria" pitchFamily="34" charset="-120"/>
               </a:rPr>
-              <a:t>Add a reset command and tidy the persona</a:t>
+              <a:t>Add a reset command and a history count</a:t>
             </a:r>
             <a:endParaRPr lang="en-US" sz="2800" dirty="0"/>
           </a:p>
@@ -9511,7 +9511,7 @@
                 <a:ea typeface="Calibri" pitchFamily="34" charset="-122"/>
                 <a:cs typeface="Calibri" pitchFamily="34" charset="-120"/>
               </a:rPr>
-              <a:t>Add a reset command that clears the ChatHistory, and fix the typos in the persona and the banner.</a:t>
+              <a:t>Add a reset command that clears the ChatHistory, and print how many messages the history holds after each reply.</a:t>
             </a:r>
             <a:endParaRPr lang="en-US" sz="1400" dirty="0"/>
           </a:p>
@@ -9870,7 +9870,7 @@
                 <a:ea typeface="Calibri" pitchFamily="34" charset="-122"/>
                 <a:cs typeface="Calibri" pitchFamily="34" charset="-120"/>
               </a:rPr>
-              <a:t>The banner and Instructions read correctly</a:t>
+              <a:t>Each reply is followed by the message count</a:t>
             </a:r>
             <a:endParaRPr lang="en-US" sz="1300" dirty="0"/>
           </a:p>
